--- a/dist/초5/수학/분수의성질/초5_수학_분수의성질_02_약분과기약분수_학생용.pptx
+++ b/dist/초5/수학/분수의성질/초5_수학_분수의성질_02_약분과기약분수_학생용.pptx
@@ -119,13 +119,13 @@
   <p:extLst>
     <p:ext uri="{521415D9-36F7-43E2-AB2F-B90AF26B5E84}">
       <p14:sectionLst xmlns:p14="http://schemas.microsoft.com/office/powerpoint/2010/main">
-        <p14:section name="도입" id="{681219c1-d15e-bdcd-ad1a-6dc0cf553343}">
+        <p14:section name="도입" id="{c6fbffa7-6189-264b-904d-258eba0e0074}">
           <p14:sldIdLst>
             <p14:sldId id="256"/>
             <p14:sldId id="257"/>
           </p14:sldIdLst>
         </p14:section>
-        <p14:section name="개념" id="{e22d6012-b5d1-8b86-4a3b-122937a23777}">
+        <p14:section name="개념" id="{b0f16590-1c58-e16b-10da-a7ba9aae8ecb}">
           <p14:sldIdLst>
             <p14:sldId id="258"/>
             <p14:sldId id="259"/>
@@ -133,31 +133,31 @@
             <p14:sldId id="262"/>
           </p14:sldIdLst>
         </p14:section>
-        <p14:section name="연습" id="{23f9e9c3-cfaa-0309-5745-ada0341db126}">
+        <p14:section name="연습" id="{e03ffb10-d5d1-1d49-2449-dabd49f9a6b1}">
           <p14:sldIdLst>
             <p14:sldId id="260"/>
             <p14:sldId id="263"/>
             <p14:sldId id="264"/>
           </p14:sldIdLst>
         </p14:section>
-        <p14:section name="개념" id="{261dc266-b30e-a5b9-3568-0e01a424b670}">
+        <p14:section name="개념" id="{5b44f555-e2df-d7a6-0d29-fdb6462edf61}">
           <p14:sldIdLst/>
         </p14:section>
-        <p14:section name="연습" id="{a3ce0b04-707d-73ce-01df-2219f3495d20}">
+        <p14:section name="연습" id="{ce0b80ae-af3b-880c-b824-6ad8a5e5e0fc}">
           <p14:sldIdLst/>
         </p14:section>
-        <p14:section name="확인" id="{b5429551-353a-f980-6699-f5fa28d4b000}">
+        <p14:section name="확인" id="{d2c8e22c-5e1a-d266-4ac3-485a3e475ddd}">
           <p14:sldIdLst>
             <p14:sldId id="265"/>
             <p14:sldId id="266"/>
           </p14:sldIdLst>
         </p14:section>
-        <p14:section name="정리" id="{5829ffaa-fb1d-6cc9-db86-90324f8e7075}">
+        <p14:section name="정리" id="{561696b5-b6a2-c3c4-097d-f509dc1459f1}">
           <p14:sldIdLst>
             <p14:sldId id="267"/>
           </p14:sldIdLst>
         </p14:section>
-        <p14:section name="보충" id="{e93a9f59-6cb2-9083-5abb-4bd9638b9c30}">
+        <p14:section name="보충" id="{d78103c7-b0ce-a0d4-19dd-355b74a04c3b}">
           <p14:sldIdLst>
             <p14:sldId id="268"/>
           </p14:sldIdLst>
